--- a/docs/08_簡報/AI_流程圖彙整_2026-10-10.pptx
+++ b/docs/08_簡報/AI_流程圖彙整_2026-10-10.pptx
@@ -22,6 +22,7 @@
     <p:sldId id="270" r:id="rId21"/>
     <p:sldId id="271" r:id="rId22"/>
     <p:sldId id="272" r:id="rId23"/>
+    <p:sldId id="273" r:id="rId24"/>
   </p:sldIdLst>
   <p:sldSz cx="12191695" cy="6858000" type="screen4x3"/>
   <p:notesSz cx="6858000" cy="9144000"/>
@@ -3281,7 +3282,7 @@
                 </a:solidFill>
                 <a:latin typeface="Microsoft JhengHei"/>
               </a:rPr>
-              <a:t>圖 10｜系統管理者維護校系備審要求流程圖</a:t>
+              <a:t>圖 9｜導師確認流程圖</a:t>
             </a:r>
           </a:p>
         </p:txBody>
@@ -3358,7 +3359,7 @@
       </p:sp>
       <p:pic>
         <p:nvPicPr>
-          <p:cNvPr id="6" name="Picture 5" descr="D-17-admin-maintain-requirements.png"/>
+          <p:cNvPr id="6" name="Picture 5" descr="D-16-teacher-confirm-flow.png"/>
           <p:cNvPicPr>
             <a:picLocks noChangeAspect="1"/>
           </p:cNvPicPr>
@@ -3372,8 +3373,8 @@
         </p:blipFill>
         <p:spPr>
           <a:xfrm>
-            <a:off x="4978051" y="1143000"/>
-            <a:ext cx="2251137" cy="5166360"/>
+            <a:off x="3417660" y="1143000"/>
+            <a:ext cx="5371918" cy="5166360"/>
           </a:xfrm>
           <a:prstGeom prst="rect">
             <a:avLst/>
@@ -3410,7 +3411,7 @@
                 </a:solidFill>
                 <a:latin typeface="Microsoft JhengHei"/>
               </a:rPr>
-              <a:t>原圖：docs/images/D-17-admin-maintain-requirements.png</a:t>
+              <a:t>原圖：docs/images/D-16-teacher-confirm-flow.png</a:t>
             </a:r>
           </a:p>
         </p:txBody>
@@ -3514,7 +3515,7 @@
                 </a:solidFill>
                 <a:latin typeface="Microsoft JhengHei"/>
               </a:rPr>
-              <a:t>圖 11｜角色與責任圖</a:t>
+              <a:t>圖 10｜系統管理者維護校系備審要求流程圖</a:t>
             </a:r>
           </a:p>
         </p:txBody>
@@ -3591,7 +3592,7 @@
       </p:sp>
       <p:pic>
         <p:nvPicPr>
-          <p:cNvPr id="6" name="Picture 5" descr="D-14-role-responsibility.png"/>
+          <p:cNvPr id="6" name="Picture 5" descr="D-17-admin-maintain-requirements.png"/>
           <p:cNvPicPr>
             <a:picLocks noChangeAspect="1"/>
           </p:cNvPicPr>
@@ -3605,8 +3606,8 @@
         </p:blipFill>
         <p:spPr>
           <a:xfrm>
-            <a:off x="502920" y="2847498"/>
-            <a:ext cx="11201400" cy="1757362"/>
+            <a:off x="4978051" y="1143000"/>
+            <a:ext cx="2251137" cy="5166360"/>
           </a:xfrm>
           <a:prstGeom prst="rect">
             <a:avLst/>
@@ -3643,7 +3644,7 @@
                 </a:solidFill>
                 <a:latin typeface="Microsoft JhengHei"/>
               </a:rPr>
-              <a:t>原圖：docs/images/D-14-role-responsibility.png</a:t>
+              <a:t>原圖：docs/images/D-17-admin-maintain-requirements.png</a:t>
             </a:r>
           </a:p>
         </p:txBody>
@@ -3747,7 +3748,7 @@
                 </a:solidFill>
                 <a:latin typeface="Microsoft JhengHei"/>
               </a:rPr>
-              <a:t>圖 12｜系統架構圖</a:t>
+              <a:t>圖 11｜角色與責任圖</a:t>
             </a:r>
           </a:p>
         </p:txBody>
@@ -3824,7 +3825,7 @@
       </p:sp>
       <p:pic>
         <p:nvPicPr>
-          <p:cNvPr id="6" name="Picture 5" descr="D-05-system-architecture.png"/>
+          <p:cNvPr id="6" name="Picture 5" descr="D-14-role-responsibility.png"/>
           <p:cNvPicPr>
             <a:picLocks noChangeAspect="1"/>
           </p:cNvPicPr>
@@ -3838,8 +3839,8 @@
         </p:blipFill>
         <p:spPr>
           <a:xfrm>
-            <a:off x="502920" y="1847373"/>
-            <a:ext cx="11201400" cy="3757612"/>
+            <a:off x="502920" y="2847498"/>
+            <a:ext cx="11201400" cy="1757362"/>
           </a:xfrm>
           <a:prstGeom prst="rect">
             <a:avLst/>
@@ -3876,7 +3877,7 @@
                 </a:solidFill>
                 <a:latin typeface="Microsoft JhengHei"/>
               </a:rPr>
-              <a:t>原圖：docs/images/D-05-system-architecture.png</a:t>
+              <a:t>原圖：docs/images/D-14-role-responsibility.png</a:t>
             </a:r>
           </a:p>
         </p:txBody>
@@ -3980,7 +3981,7 @@
                 </a:solidFill>
                 <a:latin typeface="Microsoft JhengHei"/>
               </a:rPr>
-              <a:t>圖 13｜DFD 資料流程圖</a:t>
+              <a:t>圖 12｜系統架構圖</a:t>
             </a:r>
           </a:p>
         </p:txBody>
@@ -4057,7 +4058,7 @@
       </p:sp>
       <p:pic>
         <p:nvPicPr>
-          <p:cNvPr id="6" name="Picture 5" descr="D-06-dfd.png"/>
+          <p:cNvPr id="6" name="Picture 5" descr="D-05-system-architecture.png"/>
           <p:cNvPicPr>
             <a:picLocks noChangeAspect="1"/>
           </p:cNvPicPr>
@@ -4071,8 +4072,8 @@
         </p:blipFill>
         <p:spPr>
           <a:xfrm>
-            <a:off x="2223901" y="1143000"/>
-            <a:ext cx="7759437" cy="5166360"/>
+            <a:off x="502920" y="1847373"/>
+            <a:ext cx="11201400" cy="3757612"/>
           </a:xfrm>
           <a:prstGeom prst="rect">
             <a:avLst/>
@@ -4109,7 +4110,7 @@
                 </a:solidFill>
                 <a:latin typeface="Microsoft JhengHei"/>
               </a:rPr>
-              <a:t>原圖：docs/images/D-06-dfd.png</a:t>
+              <a:t>原圖：docs/images/D-05-system-architecture.png</a:t>
             </a:r>
           </a:p>
         </p:txBody>
@@ -4213,7 +4214,7 @@
                 </a:solidFill>
                 <a:latin typeface="Microsoft JhengHei"/>
               </a:rPr>
-              <a:t>圖 14｜ERD 資料庫關聯圖</a:t>
+              <a:t>圖 13｜DFD 資料流程圖</a:t>
             </a:r>
           </a:p>
         </p:txBody>
@@ -4290,7 +4291,7 @@
       </p:sp>
       <p:pic>
         <p:nvPicPr>
-          <p:cNvPr id="6" name="Picture 5" descr="D-09-erd-v2.png"/>
+          <p:cNvPr id="6" name="Picture 5" descr="D-06-dfd.png"/>
           <p:cNvPicPr>
             <a:picLocks noChangeAspect="1"/>
           </p:cNvPicPr>
@@ -4304,8 +4305,8 @@
         </p:blipFill>
         <p:spPr>
           <a:xfrm>
-            <a:off x="502920" y="1768792"/>
-            <a:ext cx="11201400" cy="3914775"/>
+            <a:off x="2223901" y="1143000"/>
+            <a:ext cx="7759437" cy="5166360"/>
           </a:xfrm>
           <a:prstGeom prst="rect">
             <a:avLst/>
@@ -4342,7 +4343,7 @@
                 </a:solidFill>
                 <a:latin typeface="Microsoft JhengHei"/>
               </a:rPr>
-              <a:t>原圖：docs/images/D-09-erd-v2.png</a:t>
+              <a:t>原圖：docs/images/D-06-dfd.png</a:t>
             </a:r>
           </a:p>
         </p:txBody>
@@ -4446,7 +4447,7 @@
                 </a:solidFill>
                 <a:latin typeface="Microsoft JhengHei"/>
               </a:rPr>
-              <a:t>圖 15｜報告用總體流程圖</a:t>
+              <a:t>圖 14｜ERD 資料庫關聯圖</a:t>
             </a:r>
           </a:p>
         </p:txBody>
@@ -4523,7 +4524,7 @@
       </p:sp>
       <p:pic>
         <p:nvPicPr>
-          <p:cNvPr id="6" name="Picture 5" descr="D-15-report-overview.png"/>
+          <p:cNvPr id="6" name="Picture 5" descr="D-09-erd-v2.png"/>
           <p:cNvPicPr>
             <a:picLocks noChangeAspect="1"/>
           </p:cNvPicPr>
@@ -4537,8 +4538,8 @@
         </p:blipFill>
         <p:spPr>
           <a:xfrm>
-            <a:off x="502920" y="3426142"/>
-            <a:ext cx="11201400" cy="600075"/>
+            <a:off x="502920" y="1768792"/>
+            <a:ext cx="11201400" cy="3914775"/>
           </a:xfrm>
           <a:prstGeom prst="rect">
             <a:avLst/>
@@ -4575,7 +4576,7 @@
                 </a:solidFill>
                 <a:latin typeface="Microsoft JhengHei"/>
               </a:rPr>
-              <a:t>原圖：docs/images/D-15-report-overview.png</a:t>
+              <a:t>原圖：docs/images/D-09-erd-v2.png</a:t>
             </a:r>
           </a:p>
         </p:txBody>
@@ -4679,7 +4680,7 @@
                 </a:solidFill>
                 <a:latin typeface="Microsoft JhengHei"/>
               </a:rPr>
-              <a:t>圖 16｜科辦核准電子獎狀流程圖</a:t>
+              <a:t>圖 15｜報告用總體流程圖</a:t>
             </a:r>
           </a:p>
         </p:txBody>
@@ -4756,7 +4757,7 @@
       </p:sp>
       <p:pic>
         <p:nvPicPr>
-          <p:cNvPr id="6" name="Picture 5" descr="D-18-staff-service-record-flow.png"/>
+          <p:cNvPr id="6" name="Picture 5" descr="D-15-report-overview.png"/>
           <p:cNvPicPr>
             <a:picLocks noChangeAspect="1"/>
           </p:cNvPicPr>
@@ -4770,8 +4771,8 @@
         </p:blipFill>
         <p:spPr>
           <a:xfrm>
-            <a:off x="3181234" y="1143000"/>
-            <a:ext cx="5844770" cy="5166360"/>
+            <a:off x="502920" y="3426142"/>
+            <a:ext cx="11201400" cy="600075"/>
           </a:xfrm>
           <a:prstGeom prst="rect">
             <a:avLst/>
@@ -4808,7 +4809,7 @@
                 </a:solidFill>
                 <a:latin typeface="Microsoft JhengHei"/>
               </a:rPr>
-              <a:t>原圖：docs/images/D-18-staff-service-record-flow.png</a:t>
+              <a:t>原圖：docs/images/D-15-report-overview.png</a:t>
             </a:r>
           </a:p>
         </p:txBody>
@@ -4912,6 +4913,239 @@
                 </a:solidFill>
                 <a:latin typeface="Microsoft JhengHei"/>
               </a:rPr>
+              <a:t>圖 16｜科辦核准電子獎狀流程圖</a:t>
+            </a:r>
+          </a:p>
+        </p:txBody>
+      </p:sp>
+      <p:sp>
+        <p:nvSpPr>
+          <p:cNvPr id="4" name="TextBox 3"/>
+          <p:cNvSpPr txBox="1"/>
+          <p:nvPr/>
+        </p:nvSpPr>
+        <p:spPr>
+          <a:xfrm>
+            <a:off x="10378440" y="512064"/>
+            <a:ext cx="1234440" cy="228600"/>
+          </a:xfrm>
+          <a:prstGeom prst="rect">
+            <a:avLst/>
+          </a:prstGeom>
+          <a:noFill/>
+        </p:spPr>
+        <p:txBody>
+          <a:bodyPr wrap="square" lIns="54864" rIns="54864" tIns="27432" bIns="27432" anchor="t">
+            <a:spAutoFit/>
+          </a:bodyPr>
+          <a:lstStyle/>
+          <a:p>
+            <a:pPr algn="r"/>
+            <a:r>
+              <a:rPr sz="900" b="1">
+                <a:solidFill>
+                  <a:srgbClr val="208985"/>
+                </a:solidFill>
+                <a:latin typeface="Microsoft JhengHei"/>
+              </a:rPr>
+              <a:t>流程圖附錄</a:t>
+            </a:r>
+          </a:p>
+        </p:txBody>
+      </p:sp>
+      <p:sp>
+        <p:nvSpPr>
+          <p:cNvPr id="5" name="TextBox 4"/>
+          <p:cNvSpPr txBox="1"/>
+          <p:nvPr/>
+        </p:nvSpPr>
+        <p:spPr>
+          <a:xfrm>
+            <a:off x="566928" y="6565392"/>
+            <a:ext cx="7772400" cy="182880"/>
+          </a:xfrm>
+          <a:prstGeom prst="rect">
+            <a:avLst/>
+          </a:prstGeom>
+          <a:noFill/>
+        </p:spPr>
+        <p:txBody>
+          <a:bodyPr wrap="square" lIns="54864" rIns="54864" tIns="27432" bIns="27432" anchor="t">
+            <a:spAutoFit/>
+          </a:bodyPr>
+          <a:lstStyle/>
+          <a:p>
+            <a:pPr algn="l"/>
+            <a:r>
+              <a:rPr sz="800" b="0">
+                <a:solidFill>
+                  <a:srgbClr val="5D6B79"/>
+                </a:solidFill>
+                <a:latin typeface="Microsoft JhengHei"/>
+              </a:rPr>
+              <a:t>資管科智慧學習歷程系統｜指導老師討論版</a:t>
+            </a:r>
+          </a:p>
+        </p:txBody>
+      </p:sp>
+      <p:pic>
+        <p:nvPicPr>
+          <p:cNvPr id="6" name="Picture 5" descr="D-18-staff-service-record-flow.png"/>
+          <p:cNvPicPr>
+            <a:picLocks noChangeAspect="1"/>
+          </p:cNvPicPr>
+          <p:nvPr/>
+        </p:nvPicPr>
+        <p:blipFill>
+          <a:blip r:embed="rId2"/>
+          <a:stretch>
+            <a:fillRect/>
+          </a:stretch>
+        </p:blipFill>
+        <p:spPr>
+          <a:xfrm>
+            <a:off x="3181234" y="1143000"/>
+            <a:ext cx="5844770" cy="5166360"/>
+          </a:xfrm>
+          <a:prstGeom prst="rect">
+            <a:avLst/>
+          </a:prstGeom>
+        </p:spPr>
+      </p:pic>
+      <p:sp>
+        <p:nvSpPr>
+          <p:cNvPr id="7" name="TextBox 6"/>
+          <p:cNvSpPr txBox="1"/>
+          <p:nvPr/>
+        </p:nvSpPr>
+        <p:spPr>
+          <a:xfrm>
+            <a:off x="658368" y="6272784"/>
+            <a:ext cx="10881360" cy="228600"/>
+          </a:xfrm>
+          <a:prstGeom prst="rect">
+            <a:avLst/>
+          </a:prstGeom>
+          <a:noFill/>
+        </p:spPr>
+        <p:txBody>
+          <a:bodyPr wrap="square" lIns="54864" rIns="54864" tIns="27432" bIns="27432" anchor="t">
+            <a:spAutoFit/>
+          </a:bodyPr>
+          <a:lstStyle/>
+          <a:p>
+            <a:pPr algn="ctr"/>
+            <a:r>
+              <a:rPr sz="1000" b="0">
+                <a:solidFill>
+                  <a:srgbClr val="5D6B79"/>
+                </a:solidFill>
+                <a:latin typeface="Microsoft JhengHei"/>
+              </a:rPr>
+              <a:t>原圖：docs/images/D-18-staff-service-record-flow.png</a:t>
+            </a:r>
+          </a:p>
+        </p:txBody>
+      </p:sp>
+    </p:spTree>
+  </p:cSld>
+  <p:clrMapOvr>
+    <a:masterClrMapping/>
+  </p:clrMapOvr>
+</p:sld>
+</file>
+
+<file path=ppt/slides/slide18.xml><?xml version="1.0" encoding="utf-8"?>
+<p:sld xmlns:a="http://schemas.openxmlformats.org/drawingml/2006/main" xmlns:p="http://schemas.openxmlformats.org/presentationml/2006/main" xmlns:r="http://schemas.openxmlformats.org/officeDocument/2006/relationships">
+  <p:cSld>
+    <p:bg>
+      <p:bgPr>
+        <a:solidFill>
+          <a:srgbClr val="FFFFFF"/>
+        </a:solidFill>
+        <a:effectLst/>
+      </p:bgPr>
+    </p:bg>
+    <p:spTree>
+      <p:nvGrpSpPr>
+        <p:cNvPr id="1" name=""/>
+        <p:cNvGrpSpPr/>
+        <p:nvPr/>
+      </p:nvGrpSpPr>
+      <p:grpSpPr/>
+      <p:sp>
+        <p:nvSpPr>
+          <p:cNvPr id="2" name="Rectangle 1"/>
+          <p:cNvSpPr/>
+          <p:nvPr/>
+        </p:nvSpPr>
+        <p:spPr>
+          <a:xfrm>
+            <a:off x="0" y="0"/>
+            <a:ext cx="12191695" cy="164592"/>
+          </a:xfrm>
+          <a:prstGeom prst="rect">
+            <a:avLst/>
+          </a:prstGeom>
+          <a:solidFill>
+            <a:srgbClr val="208985"/>
+          </a:solidFill>
+          <a:ln>
+            <a:noFill/>
+          </a:ln>
+        </p:spPr>
+        <p:style>
+          <a:lnRef idx="1">
+            <a:schemeClr val="accent1"/>
+          </a:lnRef>
+          <a:fillRef idx="3">
+            <a:schemeClr val="accent1"/>
+          </a:fillRef>
+          <a:effectRef idx="2">
+            <a:schemeClr val="accent1"/>
+          </a:effectRef>
+          <a:fontRef idx="minor">
+            <a:schemeClr val="lt1"/>
+          </a:fontRef>
+        </p:style>
+        <p:txBody>
+          <a:bodyPr rtlCol="0" anchor="ctr"/>
+          <a:lstStyle/>
+          <a:p>
+            <a:pPr algn="ctr"/>
+          </a:p>
+        </p:txBody>
+      </p:sp>
+      <p:sp>
+        <p:nvSpPr>
+          <p:cNvPr id="3" name="TextBox 2"/>
+          <p:cNvSpPr txBox="1"/>
+          <p:nvPr/>
+        </p:nvSpPr>
+        <p:spPr>
+          <a:xfrm>
+            <a:off x="566928" y="438912"/>
+            <a:ext cx="10881360" cy="502920"/>
+          </a:xfrm>
+          <a:prstGeom prst="rect">
+            <a:avLst/>
+          </a:prstGeom>
+          <a:noFill/>
+        </p:spPr>
+        <p:txBody>
+          <a:bodyPr wrap="square" lIns="54864" rIns="54864" tIns="27432" bIns="27432" anchor="t">
+            <a:spAutoFit/>
+          </a:bodyPr>
+          <a:lstStyle/>
+          <a:p>
+            <a:pPr algn="l"/>
+            <a:r>
+              <a:rPr sz="2700" b="1">
+                <a:solidFill>
+                  <a:srgbClr val="142E4E"/>
+                </a:solidFill>
+                <a:latin typeface="Microsoft JhengHei"/>
+              </a:rPr>
               <a:t>圖 17｜二技招生公告與 AI 推薦校系流程圖</a:t>
             </a:r>
           </a:p>
@@ -6543,7 +6777,7 @@
                 </a:solidFill>
                 <a:latin typeface="Microsoft JhengHei"/>
               </a:rPr>
-              <a:t>圖 8｜招生資料更新流程圖</a:t>
+              <a:t>圖 6｜科辦表單下載區流程圖</a:t>
             </a:r>
           </a:p>
         </p:txBody>
@@ -6620,7 +6854,7 @@
       </p:sp>
       <p:pic>
         <p:nvPicPr>
-          <p:cNvPr id="6" name="Picture 5" descr="D-13-admission-rule-update-flow.png"/>
+          <p:cNvPr id="6" name="Picture 5" descr="D-20-form-download-flow.png"/>
           <p:cNvPicPr>
             <a:picLocks noChangeAspect="1"/>
           </p:cNvPicPr>
@@ -6634,8 +6868,8 @@
         </p:blipFill>
         <p:spPr>
           <a:xfrm>
-            <a:off x="5207904" y="1142999"/>
-            <a:ext cx="1791431" cy="5166360"/>
+            <a:off x="4939704" y="1143000"/>
+            <a:ext cx="2327831" cy="5166360"/>
           </a:xfrm>
           <a:prstGeom prst="rect">
             <a:avLst/>
@@ -6672,7 +6906,7 @@
                 </a:solidFill>
                 <a:latin typeface="Microsoft JhengHei"/>
               </a:rPr>
-              <a:t>原圖：docs/images/D-13-admission-rule-update-flow.png</a:t>
+              <a:t>原圖：docs/images/D-20-form-download-flow.png</a:t>
             </a:r>
           </a:p>
         </p:txBody>
@@ -6776,7 +7010,7 @@
                 </a:solidFill>
                 <a:latin typeface="Microsoft JhengHei"/>
               </a:rPr>
-              <a:t>圖 9｜導師確認流程圖</a:t>
+              <a:t>圖 8｜招生資料更新流程圖</a:t>
             </a:r>
           </a:p>
         </p:txBody>
@@ -6853,7 +7087,7 @@
       </p:sp>
       <p:pic>
         <p:nvPicPr>
-          <p:cNvPr id="6" name="Picture 5" descr="D-16-teacher-confirm-flow.png"/>
+          <p:cNvPr id="6" name="Picture 5" descr="D-13-admission-rule-update-flow.png"/>
           <p:cNvPicPr>
             <a:picLocks noChangeAspect="1"/>
           </p:cNvPicPr>
@@ -6867,8 +7101,8 @@
         </p:blipFill>
         <p:spPr>
           <a:xfrm>
-            <a:off x="3417660" y="1143000"/>
-            <a:ext cx="5371918" cy="5166360"/>
+            <a:off x="5207904" y="1142999"/>
+            <a:ext cx="1791431" cy="5166360"/>
           </a:xfrm>
           <a:prstGeom prst="rect">
             <a:avLst/>
@@ -6905,7 +7139,7 @@
                 </a:solidFill>
                 <a:latin typeface="Microsoft JhengHei"/>
               </a:rPr>
-              <a:t>原圖：docs/images/D-16-teacher-confirm-flow.png</a:t>
+              <a:t>原圖：docs/images/D-13-admission-rule-update-flow.png</a:t>
             </a:r>
           </a:p>
         </p:txBody>

--- a/docs/08_簡報/AI_流程圖彙整_2026-10-10.pptx
+++ b/docs/08_簡報/AI_流程圖彙整_2026-10-10.pptx
@@ -23,6 +23,10 @@
     <p:sldId id="271" r:id="rId22"/>
     <p:sldId id="272" r:id="rId23"/>
     <p:sldId id="273" r:id="rId24"/>
+    <p:sldId id="274" r:id="rId25"/>
+    <p:sldId id="275" r:id="rId26"/>
+    <p:sldId id="276" r:id="rId27"/>
+    <p:sldId id="277" r:id="rId28"/>
   </p:sldIdLst>
   <p:sldSz cx="12191695" cy="6858000" type="screen4x3"/>
   <p:notesSz cx="6858000" cy="9144000"/>
@@ -3143,7 +3147,7 @@
                 </a:solidFill>
                 <a:latin typeface="Microsoft JhengHei"/>
               </a:rPr>
-              <a:t>流程圖彙整（2026-10-10 版）</a:t>
+              <a:t>流程圖彙整（2026-10-10 晚，圖號重排）</a:t>
             </a:r>
           </a:p>
         </p:txBody>
@@ -3282,7 +3286,7 @@
                 </a:solidFill>
                 <a:latin typeface="Microsoft JhengHei"/>
               </a:rPr>
-              <a:t>圖 9｜導師確認流程圖</a:t>
+              <a:t>圖 9｜科辦核准電子獎狀流程圖</a:t>
             </a:r>
           </a:p>
         </p:txBody>
@@ -3359,7 +3363,7 @@
       </p:sp>
       <p:pic>
         <p:nvPicPr>
-          <p:cNvPr id="6" name="Picture 5" descr="D-16-teacher-confirm-flow.png"/>
+          <p:cNvPr id="6" name="Picture 5" descr="D-18-staff-service-record-flow.png"/>
           <p:cNvPicPr>
             <a:picLocks noChangeAspect="1"/>
           </p:cNvPicPr>
@@ -3373,8 +3377,8 @@
         </p:blipFill>
         <p:spPr>
           <a:xfrm>
-            <a:off x="3417660" y="1143000"/>
-            <a:ext cx="5371918" cy="5166360"/>
+            <a:off x="3181234" y="1143000"/>
+            <a:ext cx="5844770" cy="5166360"/>
           </a:xfrm>
           <a:prstGeom prst="rect">
             <a:avLst/>
@@ -3411,7 +3415,7 @@
                 </a:solidFill>
                 <a:latin typeface="Microsoft JhengHei"/>
               </a:rPr>
-              <a:t>原圖：docs/images/D-16-teacher-confirm-flow.png</a:t>
+              <a:t>原圖：docs/images/D-18-staff-service-record-flow.png</a:t>
             </a:r>
           </a:p>
         </p:txBody>
@@ -3515,7 +3519,7 @@
                 </a:solidFill>
                 <a:latin typeface="Microsoft JhengHei"/>
               </a:rPr>
-              <a:t>圖 10｜系統管理者維護校系備審要求流程圖</a:t>
+              <a:t>圖 10｜科辦表單下載區流程圖</a:t>
             </a:r>
           </a:p>
         </p:txBody>
@@ -3592,7 +3596,7 @@
       </p:sp>
       <p:pic>
         <p:nvPicPr>
-          <p:cNvPr id="6" name="Picture 5" descr="D-17-admin-maintain-requirements.png"/>
+          <p:cNvPr id="6" name="Picture 5" descr="D-20-form-download-flow.png"/>
           <p:cNvPicPr>
             <a:picLocks noChangeAspect="1"/>
           </p:cNvPicPr>
@@ -3606,8 +3610,8 @@
         </p:blipFill>
         <p:spPr>
           <a:xfrm>
-            <a:off x="4978051" y="1143000"/>
-            <a:ext cx="2251137" cy="5166360"/>
+            <a:off x="4939704" y="1143000"/>
+            <a:ext cx="2327831" cy="5166360"/>
           </a:xfrm>
           <a:prstGeom prst="rect">
             <a:avLst/>
@@ -3644,7 +3648,7 @@
                 </a:solidFill>
                 <a:latin typeface="Microsoft JhengHei"/>
               </a:rPr>
-              <a:t>原圖：docs/images/D-17-admin-maintain-requirements.png</a:t>
+              <a:t>原圖：docs/images/D-20-form-download-flow.png</a:t>
             </a:r>
           </a:p>
         </p:txBody>
@@ -3748,7 +3752,7 @@
                 </a:solidFill>
                 <a:latin typeface="Microsoft JhengHei"/>
               </a:rPr>
-              <a:t>圖 11｜角色與責任圖</a:t>
+              <a:t>圖 11｜招生資料更新流程圖</a:t>
             </a:r>
           </a:p>
         </p:txBody>
@@ -3825,7 +3829,7 @@
       </p:sp>
       <p:pic>
         <p:nvPicPr>
-          <p:cNvPr id="6" name="Picture 5" descr="D-14-role-responsibility.png"/>
+          <p:cNvPr id="6" name="Picture 5" descr="D-13-admission-rule-update-flow.png"/>
           <p:cNvPicPr>
             <a:picLocks noChangeAspect="1"/>
           </p:cNvPicPr>
@@ -3839,8 +3843,8 @@
         </p:blipFill>
         <p:spPr>
           <a:xfrm>
-            <a:off x="502920" y="2847498"/>
-            <a:ext cx="11201400" cy="1757362"/>
+            <a:off x="5207904" y="1142999"/>
+            <a:ext cx="1791431" cy="5166360"/>
           </a:xfrm>
           <a:prstGeom prst="rect">
             <a:avLst/>
@@ -3877,7 +3881,7 @@
                 </a:solidFill>
                 <a:latin typeface="Microsoft JhengHei"/>
               </a:rPr>
-              <a:t>原圖：docs/images/D-14-role-responsibility.png</a:t>
+              <a:t>原圖：docs/images/D-13-admission-rule-update-flow.png</a:t>
             </a:r>
           </a:p>
         </p:txBody>
@@ -3981,7 +3985,7 @@
                 </a:solidFill>
                 <a:latin typeface="Microsoft JhengHei"/>
               </a:rPr>
-              <a:t>圖 12｜系統架構圖</a:t>
+              <a:t>圖 12｜二技招生公告與 AI 推薦校系流程圖</a:t>
             </a:r>
           </a:p>
         </p:txBody>
@@ -4058,7 +4062,7 @@
       </p:sp>
       <p:pic>
         <p:nvPicPr>
-          <p:cNvPr id="6" name="Picture 5" descr="D-05-system-architecture.png"/>
+          <p:cNvPr id="6" name="Picture 5" descr="D-19-admission-announcement-flow.png"/>
           <p:cNvPicPr>
             <a:picLocks noChangeAspect="1"/>
           </p:cNvPicPr>
@@ -4072,8 +4076,8 @@
         </p:blipFill>
         <p:spPr>
           <a:xfrm>
-            <a:off x="502920" y="1847373"/>
-            <a:ext cx="11201400" cy="3757612"/>
+            <a:off x="3843337" y="1143000"/>
+            <a:ext cx="4520565" cy="5166360"/>
           </a:xfrm>
           <a:prstGeom prst="rect">
             <a:avLst/>
@@ -4110,7 +4114,7 @@
                 </a:solidFill>
                 <a:latin typeface="Microsoft JhengHei"/>
               </a:rPr>
-              <a:t>原圖：docs/images/D-05-system-architecture.png</a:t>
+              <a:t>原圖：docs/images/D-19-admission-announcement-flow.png</a:t>
             </a:r>
           </a:p>
         </p:txBody>
@@ -4214,7 +4218,7 @@
                 </a:solidFill>
                 <a:latin typeface="Microsoft JhengHei"/>
               </a:rPr>
-              <a:t>圖 13｜DFD 資料流程圖</a:t>
+              <a:t>圖 13｜官網資料來源、資料分類與來源維護流程圖</a:t>
             </a:r>
           </a:p>
         </p:txBody>
@@ -4291,7 +4295,7 @@
       </p:sp>
       <p:pic>
         <p:nvPicPr>
-          <p:cNvPr id="6" name="Picture 5" descr="D-06-dfd.png"/>
+          <p:cNvPr id="6" name="Picture 5" descr="D-22-info-source-classify-flow.png"/>
           <p:cNvPicPr>
             <a:picLocks noChangeAspect="1"/>
           </p:cNvPicPr>
@@ -4305,8 +4309,8 @@
         </p:blipFill>
         <p:spPr>
           <a:xfrm>
-            <a:off x="2223901" y="1143000"/>
-            <a:ext cx="7759437" cy="5166360"/>
+            <a:off x="4196639" y="1143000"/>
+            <a:ext cx="3813960" cy="5166360"/>
           </a:xfrm>
           <a:prstGeom prst="rect">
             <a:avLst/>
@@ -4343,7 +4347,7 @@
                 </a:solidFill>
                 <a:latin typeface="Microsoft JhengHei"/>
               </a:rPr>
-              <a:t>原圖：docs/images/D-06-dfd.png</a:t>
+              <a:t>原圖：docs/images/D-22-info-source-classify-flow.png</a:t>
             </a:r>
           </a:p>
         </p:txBody>
@@ -4447,7 +4451,7 @@
                 </a:solidFill>
                 <a:latin typeface="Microsoft JhengHei"/>
               </a:rPr>
-              <a:t>圖 14｜ERD 資料庫關聯圖</a:t>
+              <a:t>圖 14｜系統管理者維護校系備審要求流程圖</a:t>
             </a:r>
           </a:p>
         </p:txBody>
@@ -4524,7 +4528,7 @@
       </p:sp>
       <p:pic>
         <p:nvPicPr>
-          <p:cNvPr id="6" name="Picture 5" descr="D-09-erd-v2.png"/>
+          <p:cNvPr id="6" name="Picture 5" descr="D-17-admin-maintain-requirements.png"/>
           <p:cNvPicPr>
             <a:picLocks noChangeAspect="1"/>
           </p:cNvPicPr>
@@ -4538,8 +4542,8 @@
         </p:blipFill>
         <p:spPr>
           <a:xfrm>
-            <a:off x="502920" y="1768792"/>
-            <a:ext cx="11201400" cy="3914775"/>
+            <a:off x="4978051" y="1143000"/>
+            <a:ext cx="2251137" cy="5166360"/>
           </a:xfrm>
           <a:prstGeom prst="rect">
             <a:avLst/>
@@ -4576,7 +4580,7 @@
                 </a:solidFill>
                 <a:latin typeface="Microsoft JhengHei"/>
               </a:rPr>
-              <a:t>原圖：docs/images/D-09-erd-v2.png</a:t>
+              <a:t>原圖：docs/images/D-17-admin-maintain-requirements.png</a:t>
             </a:r>
           </a:p>
         </p:txBody>
@@ -4680,7 +4684,7 @@
                 </a:solidFill>
                 <a:latin typeface="Microsoft JhengHei"/>
               </a:rPr>
-              <a:t>圖 15｜報告用總體流程圖</a:t>
+              <a:t>圖 15｜角色與責任圖</a:t>
             </a:r>
           </a:p>
         </p:txBody>
@@ -4757,7 +4761,7 @@
       </p:sp>
       <p:pic>
         <p:nvPicPr>
-          <p:cNvPr id="6" name="Picture 5" descr="D-15-report-overview.png"/>
+          <p:cNvPr id="6" name="Picture 5" descr="D-14-role-responsibility.png"/>
           <p:cNvPicPr>
             <a:picLocks noChangeAspect="1"/>
           </p:cNvPicPr>
@@ -4771,8 +4775,8 @@
         </p:blipFill>
         <p:spPr>
           <a:xfrm>
-            <a:off x="502920" y="3426142"/>
-            <a:ext cx="11201400" cy="600075"/>
+            <a:off x="502920" y="2840355"/>
+            <a:ext cx="11201400" cy="1771650"/>
           </a:xfrm>
           <a:prstGeom prst="rect">
             <a:avLst/>
@@ -4809,7 +4813,7 @@
                 </a:solidFill>
                 <a:latin typeface="Microsoft JhengHei"/>
               </a:rPr>
-              <a:t>原圖：docs/images/D-15-report-overview.png</a:t>
+              <a:t>原圖：docs/images/D-14-role-responsibility.png</a:t>
             </a:r>
           </a:p>
         </p:txBody>
@@ -4913,7 +4917,7 @@
                 </a:solidFill>
                 <a:latin typeface="Microsoft JhengHei"/>
               </a:rPr>
-              <a:t>圖 16｜科辦核准電子獎狀流程圖</a:t>
+              <a:t>圖 16｜系統架構圖</a:t>
             </a:r>
           </a:p>
         </p:txBody>
@@ -4990,7 +4994,7 @@
       </p:sp>
       <p:pic>
         <p:nvPicPr>
-          <p:cNvPr id="6" name="Picture 5" descr="D-18-staff-service-record-flow.png"/>
+          <p:cNvPr id="6" name="Picture 5" descr="D-05-system-architecture.png"/>
           <p:cNvPicPr>
             <a:picLocks noChangeAspect="1"/>
           </p:cNvPicPr>
@@ -5004,8 +5008,8 @@
         </p:blipFill>
         <p:spPr>
           <a:xfrm>
-            <a:off x="3181234" y="1143000"/>
-            <a:ext cx="5844770" cy="5166360"/>
+            <a:off x="502920" y="1868805"/>
+            <a:ext cx="11201400" cy="3714750"/>
           </a:xfrm>
           <a:prstGeom prst="rect">
             <a:avLst/>
@@ -5042,7 +5046,7 @@
                 </a:solidFill>
                 <a:latin typeface="Microsoft JhengHei"/>
               </a:rPr>
-              <a:t>原圖：docs/images/D-18-staff-service-record-flow.png</a:t>
+              <a:t>原圖：docs/images/D-05-system-architecture.png</a:t>
             </a:r>
           </a:p>
         </p:txBody>
@@ -5146,7 +5150,7 @@
                 </a:solidFill>
                 <a:latin typeface="Microsoft JhengHei"/>
               </a:rPr>
-              <a:t>圖 17｜二技招生公告與 AI 推薦校系流程圖</a:t>
+              <a:t>圖 17｜DFD 資料流程圖</a:t>
             </a:r>
           </a:p>
         </p:txBody>
@@ -5223,7 +5227,7 @@
       </p:sp>
       <p:pic>
         <p:nvPicPr>
-          <p:cNvPr id="6" name="Picture 5" descr="D-19-admission-announcement-flow.png"/>
+          <p:cNvPr id="6" name="Picture 5" descr="D-06-dfd.png"/>
           <p:cNvPicPr>
             <a:picLocks noChangeAspect="1"/>
           </p:cNvPicPr>
@@ -5237,8 +5241,8 @@
         </p:blipFill>
         <p:spPr>
           <a:xfrm>
-            <a:off x="3843337" y="1143000"/>
-            <a:ext cx="4520565" cy="5166360"/>
+            <a:off x="502920" y="1254442"/>
+            <a:ext cx="11201400" cy="4943475"/>
           </a:xfrm>
           <a:prstGeom prst="rect">
             <a:avLst/>
@@ -5275,7 +5279,240 @@
                 </a:solidFill>
                 <a:latin typeface="Microsoft JhengHei"/>
               </a:rPr>
-              <a:t>原圖：docs/images/D-19-admission-announcement-flow.png</a:t>
+              <a:t>原圖：docs/images/D-06-dfd.png</a:t>
+            </a:r>
+          </a:p>
+        </p:txBody>
+      </p:sp>
+    </p:spTree>
+  </p:cSld>
+  <p:clrMapOvr>
+    <a:masterClrMapping/>
+  </p:clrMapOvr>
+</p:sld>
+</file>
+
+<file path=ppt/slides/slide19.xml><?xml version="1.0" encoding="utf-8"?>
+<p:sld xmlns:a="http://schemas.openxmlformats.org/drawingml/2006/main" xmlns:p="http://schemas.openxmlformats.org/presentationml/2006/main" xmlns:r="http://schemas.openxmlformats.org/officeDocument/2006/relationships">
+  <p:cSld>
+    <p:bg>
+      <p:bgPr>
+        <a:solidFill>
+          <a:srgbClr val="FFFFFF"/>
+        </a:solidFill>
+        <a:effectLst/>
+      </p:bgPr>
+    </p:bg>
+    <p:spTree>
+      <p:nvGrpSpPr>
+        <p:cNvPr id="1" name=""/>
+        <p:cNvGrpSpPr/>
+        <p:nvPr/>
+      </p:nvGrpSpPr>
+      <p:grpSpPr/>
+      <p:sp>
+        <p:nvSpPr>
+          <p:cNvPr id="2" name="Rectangle 1"/>
+          <p:cNvSpPr/>
+          <p:nvPr/>
+        </p:nvSpPr>
+        <p:spPr>
+          <a:xfrm>
+            <a:off x="0" y="0"/>
+            <a:ext cx="12191695" cy="164592"/>
+          </a:xfrm>
+          <a:prstGeom prst="rect">
+            <a:avLst/>
+          </a:prstGeom>
+          <a:solidFill>
+            <a:srgbClr val="208985"/>
+          </a:solidFill>
+          <a:ln>
+            <a:noFill/>
+          </a:ln>
+        </p:spPr>
+        <p:style>
+          <a:lnRef idx="1">
+            <a:schemeClr val="accent1"/>
+          </a:lnRef>
+          <a:fillRef idx="3">
+            <a:schemeClr val="accent1"/>
+          </a:fillRef>
+          <a:effectRef idx="2">
+            <a:schemeClr val="accent1"/>
+          </a:effectRef>
+          <a:fontRef idx="minor">
+            <a:schemeClr val="lt1"/>
+          </a:fontRef>
+        </p:style>
+        <p:txBody>
+          <a:bodyPr rtlCol="0" anchor="ctr"/>
+          <a:lstStyle/>
+          <a:p>
+            <a:pPr algn="ctr"/>
+          </a:p>
+        </p:txBody>
+      </p:sp>
+      <p:sp>
+        <p:nvSpPr>
+          <p:cNvPr id="3" name="TextBox 2"/>
+          <p:cNvSpPr txBox="1"/>
+          <p:nvPr/>
+        </p:nvSpPr>
+        <p:spPr>
+          <a:xfrm>
+            <a:off x="566928" y="438912"/>
+            <a:ext cx="10881360" cy="502920"/>
+          </a:xfrm>
+          <a:prstGeom prst="rect">
+            <a:avLst/>
+          </a:prstGeom>
+          <a:noFill/>
+        </p:spPr>
+        <p:txBody>
+          <a:bodyPr wrap="square" lIns="54864" rIns="54864" tIns="27432" bIns="27432" anchor="t">
+            <a:spAutoFit/>
+          </a:bodyPr>
+          <a:lstStyle/>
+          <a:p>
+            <a:pPr algn="l"/>
+            <a:r>
+              <a:rPr sz="2700" b="1">
+                <a:solidFill>
+                  <a:srgbClr val="142E4E"/>
+                </a:solidFill>
+                <a:latin typeface="Microsoft JhengHei"/>
+              </a:rPr>
+              <a:t>圖 18-1｜ERD－帳號、學習資料與學校資料匯入</a:t>
+            </a:r>
+          </a:p>
+        </p:txBody>
+      </p:sp>
+      <p:sp>
+        <p:nvSpPr>
+          <p:cNvPr id="4" name="TextBox 3"/>
+          <p:cNvSpPr txBox="1"/>
+          <p:nvPr/>
+        </p:nvSpPr>
+        <p:spPr>
+          <a:xfrm>
+            <a:off x="10378440" y="512064"/>
+            <a:ext cx="1234440" cy="228600"/>
+          </a:xfrm>
+          <a:prstGeom prst="rect">
+            <a:avLst/>
+          </a:prstGeom>
+          <a:noFill/>
+        </p:spPr>
+        <p:txBody>
+          <a:bodyPr wrap="square" lIns="54864" rIns="54864" tIns="27432" bIns="27432" anchor="t">
+            <a:spAutoFit/>
+          </a:bodyPr>
+          <a:lstStyle/>
+          <a:p>
+            <a:pPr algn="r"/>
+            <a:r>
+              <a:rPr sz="900" b="1">
+                <a:solidFill>
+                  <a:srgbClr val="208985"/>
+                </a:solidFill>
+                <a:latin typeface="Microsoft JhengHei"/>
+              </a:rPr>
+              <a:t>流程圖附錄</a:t>
+            </a:r>
+          </a:p>
+        </p:txBody>
+      </p:sp>
+      <p:sp>
+        <p:nvSpPr>
+          <p:cNvPr id="5" name="TextBox 4"/>
+          <p:cNvSpPr txBox="1"/>
+          <p:nvPr/>
+        </p:nvSpPr>
+        <p:spPr>
+          <a:xfrm>
+            <a:off x="566928" y="6565392"/>
+            <a:ext cx="7772400" cy="182880"/>
+          </a:xfrm>
+          <a:prstGeom prst="rect">
+            <a:avLst/>
+          </a:prstGeom>
+          <a:noFill/>
+        </p:spPr>
+        <p:txBody>
+          <a:bodyPr wrap="square" lIns="54864" rIns="54864" tIns="27432" bIns="27432" anchor="t">
+            <a:spAutoFit/>
+          </a:bodyPr>
+          <a:lstStyle/>
+          <a:p>
+            <a:pPr algn="l"/>
+            <a:r>
+              <a:rPr sz="800" b="0">
+                <a:solidFill>
+                  <a:srgbClr val="5D6B79"/>
+                </a:solidFill>
+                <a:latin typeface="Microsoft JhengHei"/>
+              </a:rPr>
+              <a:t>資管科智慧學習歷程系統｜指導老師討論版</a:t>
+            </a:r>
+          </a:p>
+        </p:txBody>
+      </p:sp>
+      <p:pic>
+        <p:nvPicPr>
+          <p:cNvPr id="6" name="Picture 5" descr="D-09-erd-part1-learning.png"/>
+          <p:cNvPicPr>
+            <a:picLocks noChangeAspect="1"/>
+          </p:cNvPicPr>
+          <p:nvPr/>
+        </p:nvPicPr>
+        <p:blipFill>
+          <a:blip r:embed="rId2"/>
+          <a:stretch>
+            <a:fillRect/>
+          </a:stretch>
+        </p:blipFill>
+        <p:spPr>
+          <a:xfrm>
+            <a:off x="1065776" y="1143000"/>
+            <a:ext cx="10075687" cy="5166360"/>
+          </a:xfrm>
+          <a:prstGeom prst="rect">
+            <a:avLst/>
+          </a:prstGeom>
+        </p:spPr>
+      </p:pic>
+      <p:sp>
+        <p:nvSpPr>
+          <p:cNvPr id="7" name="TextBox 6"/>
+          <p:cNvSpPr txBox="1"/>
+          <p:nvPr/>
+        </p:nvSpPr>
+        <p:spPr>
+          <a:xfrm>
+            <a:off x="658368" y="6272784"/>
+            <a:ext cx="10881360" cy="228600"/>
+          </a:xfrm>
+          <a:prstGeom prst="rect">
+            <a:avLst/>
+          </a:prstGeom>
+          <a:noFill/>
+        </p:spPr>
+        <p:txBody>
+          <a:bodyPr wrap="square" lIns="54864" rIns="54864" tIns="27432" bIns="27432" anchor="t">
+            <a:spAutoFit/>
+          </a:bodyPr>
+          <a:lstStyle/>
+          <a:p>
+            <a:pPr algn="ctr"/>
+            <a:r>
+              <a:rPr sz="1000" b="0">
+                <a:solidFill>
+                  <a:srgbClr val="5D6B79"/>
+                </a:solidFill>
+                <a:latin typeface="Microsoft JhengHei"/>
+              </a:rPr>
+              <a:t>原圖：docs/images/D-09-erd-part1-learning.png</a:t>
             </a:r>
           </a:p>
         </p:txBody>
@@ -5470,8 +5707,8 @@
         </p:blipFill>
         <p:spPr>
           <a:xfrm>
-            <a:off x="3692652" y="1143000"/>
-            <a:ext cx="4821936" cy="5166360"/>
+            <a:off x="4032002" y="1143000"/>
+            <a:ext cx="4143234" cy="5166360"/>
           </a:xfrm>
           <a:prstGeom prst="rect">
             <a:avLst/>
@@ -5509,6 +5746,705 @@
                 <a:latin typeface="Microsoft JhengHei"/>
               </a:rPr>
               <a:t>原圖：docs/images/D-01-use-case-student.png</a:t>
+            </a:r>
+          </a:p>
+        </p:txBody>
+      </p:sp>
+    </p:spTree>
+  </p:cSld>
+  <p:clrMapOvr>
+    <a:masterClrMapping/>
+  </p:clrMapOvr>
+</p:sld>
+</file>
+
+<file path=ppt/slides/slide20.xml><?xml version="1.0" encoding="utf-8"?>
+<p:sld xmlns:a="http://schemas.openxmlformats.org/drawingml/2006/main" xmlns:p="http://schemas.openxmlformats.org/presentationml/2006/main" xmlns:r="http://schemas.openxmlformats.org/officeDocument/2006/relationships">
+  <p:cSld>
+    <p:bg>
+      <p:bgPr>
+        <a:solidFill>
+          <a:srgbClr val="FFFFFF"/>
+        </a:solidFill>
+        <a:effectLst/>
+      </p:bgPr>
+    </p:bg>
+    <p:spTree>
+      <p:nvGrpSpPr>
+        <p:cNvPr id="1" name=""/>
+        <p:cNvGrpSpPr/>
+        <p:nvPr/>
+      </p:nvGrpSpPr>
+      <p:grpSpPr/>
+      <p:sp>
+        <p:nvSpPr>
+          <p:cNvPr id="2" name="Rectangle 1"/>
+          <p:cNvSpPr/>
+          <p:nvPr/>
+        </p:nvSpPr>
+        <p:spPr>
+          <a:xfrm>
+            <a:off x="0" y="0"/>
+            <a:ext cx="12191695" cy="164592"/>
+          </a:xfrm>
+          <a:prstGeom prst="rect">
+            <a:avLst/>
+          </a:prstGeom>
+          <a:solidFill>
+            <a:srgbClr val="208985"/>
+          </a:solidFill>
+          <a:ln>
+            <a:noFill/>
+          </a:ln>
+        </p:spPr>
+        <p:style>
+          <a:lnRef idx="1">
+            <a:schemeClr val="accent1"/>
+          </a:lnRef>
+          <a:fillRef idx="3">
+            <a:schemeClr val="accent1"/>
+          </a:fillRef>
+          <a:effectRef idx="2">
+            <a:schemeClr val="accent1"/>
+          </a:effectRef>
+          <a:fontRef idx="minor">
+            <a:schemeClr val="lt1"/>
+          </a:fontRef>
+        </p:style>
+        <p:txBody>
+          <a:bodyPr rtlCol="0" anchor="ctr"/>
+          <a:lstStyle/>
+          <a:p>
+            <a:pPr algn="ctr"/>
+          </a:p>
+        </p:txBody>
+      </p:sp>
+      <p:sp>
+        <p:nvSpPr>
+          <p:cNvPr id="3" name="TextBox 2"/>
+          <p:cNvSpPr txBox="1"/>
+          <p:nvPr/>
+        </p:nvSpPr>
+        <p:spPr>
+          <a:xfrm>
+            <a:off x="566928" y="438912"/>
+            <a:ext cx="10881360" cy="502920"/>
+          </a:xfrm>
+          <a:prstGeom prst="rect">
+            <a:avLst/>
+          </a:prstGeom>
+          <a:noFill/>
+        </p:spPr>
+        <p:txBody>
+          <a:bodyPr wrap="square" lIns="54864" rIns="54864" tIns="27432" bIns="27432" anchor="t">
+            <a:spAutoFit/>
+          </a:bodyPr>
+          <a:lstStyle/>
+          <a:p>
+            <a:pPr algn="l"/>
+            <a:r>
+              <a:rPr sz="2700" b="1">
+                <a:solidFill>
+                  <a:srgbClr val="142E4E"/>
+                </a:solidFill>
+                <a:latin typeface="Microsoft JhengHei"/>
+              </a:rPr>
+              <a:t>圖 18-2｜ERD－校系、目標校系、導師確認與自傳</a:t>
+            </a:r>
+          </a:p>
+        </p:txBody>
+      </p:sp>
+      <p:sp>
+        <p:nvSpPr>
+          <p:cNvPr id="4" name="TextBox 3"/>
+          <p:cNvSpPr txBox="1"/>
+          <p:nvPr/>
+        </p:nvSpPr>
+        <p:spPr>
+          <a:xfrm>
+            <a:off x="10378440" y="512064"/>
+            <a:ext cx="1234440" cy="228600"/>
+          </a:xfrm>
+          <a:prstGeom prst="rect">
+            <a:avLst/>
+          </a:prstGeom>
+          <a:noFill/>
+        </p:spPr>
+        <p:txBody>
+          <a:bodyPr wrap="square" lIns="54864" rIns="54864" tIns="27432" bIns="27432" anchor="t">
+            <a:spAutoFit/>
+          </a:bodyPr>
+          <a:lstStyle/>
+          <a:p>
+            <a:pPr algn="r"/>
+            <a:r>
+              <a:rPr sz="900" b="1">
+                <a:solidFill>
+                  <a:srgbClr val="208985"/>
+                </a:solidFill>
+                <a:latin typeface="Microsoft JhengHei"/>
+              </a:rPr>
+              <a:t>流程圖附錄</a:t>
+            </a:r>
+          </a:p>
+        </p:txBody>
+      </p:sp>
+      <p:sp>
+        <p:nvSpPr>
+          <p:cNvPr id="5" name="TextBox 4"/>
+          <p:cNvSpPr txBox="1"/>
+          <p:nvPr/>
+        </p:nvSpPr>
+        <p:spPr>
+          <a:xfrm>
+            <a:off x="566928" y="6565392"/>
+            <a:ext cx="7772400" cy="182880"/>
+          </a:xfrm>
+          <a:prstGeom prst="rect">
+            <a:avLst/>
+          </a:prstGeom>
+          <a:noFill/>
+        </p:spPr>
+        <p:txBody>
+          <a:bodyPr wrap="square" lIns="54864" rIns="54864" tIns="27432" bIns="27432" anchor="t">
+            <a:spAutoFit/>
+          </a:bodyPr>
+          <a:lstStyle/>
+          <a:p>
+            <a:pPr algn="l"/>
+            <a:r>
+              <a:rPr sz="800" b="0">
+                <a:solidFill>
+                  <a:srgbClr val="5D6B79"/>
+                </a:solidFill>
+                <a:latin typeface="Microsoft JhengHei"/>
+              </a:rPr>
+              <a:t>資管科智慧學習歷程系統｜指導老師討論版</a:t>
+            </a:r>
+          </a:p>
+        </p:txBody>
+      </p:sp>
+      <p:pic>
+        <p:nvPicPr>
+          <p:cNvPr id="6" name="Picture 5" descr="D-09-erd-part2-review.png"/>
+          <p:cNvPicPr>
+            <a:picLocks noChangeAspect="1"/>
+          </p:cNvPicPr>
+          <p:nvPr/>
+        </p:nvPicPr>
+        <p:blipFill>
+          <a:blip r:embed="rId2"/>
+          <a:stretch>
+            <a:fillRect/>
+          </a:stretch>
+        </p:blipFill>
+        <p:spPr>
+          <a:xfrm>
+            <a:off x="2665227" y="1143000"/>
+            <a:ext cx="6876784" cy="5166360"/>
+          </a:xfrm>
+          <a:prstGeom prst="rect">
+            <a:avLst/>
+          </a:prstGeom>
+        </p:spPr>
+      </p:pic>
+      <p:sp>
+        <p:nvSpPr>
+          <p:cNvPr id="7" name="TextBox 6"/>
+          <p:cNvSpPr txBox="1"/>
+          <p:nvPr/>
+        </p:nvSpPr>
+        <p:spPr>
+          <a:xfrm>
+            <a:off x="658368" y="6272784"/>
+            <a:ext cx="10881360" cy="228600"/>
+          </a:xfrm>
+          <a:prstGeom prst="rect">
+            <a:avLst/>
+          </a:prstGeom>
+          <a:noFill/>
+        </p:spPr>
+        <p:txBody>
+          <a:bodyPr wrap="square" lIns="54864" rIns="54864" tIns="27432" bIns="27432" anchor="t">
+            <a:spAutoFit/>
+          </a:bodyPr>
+          <a:lstStyle/>
+          <a:p>
+            <a:pPr algn="ctr"/>
+            <a:r>
+              <a:rPr sz="1000" b="0">
+                <a:solidFill>
+                  <a:srgbClr val="5D6B79"/>
+                </a:solidFill>
+                <a:latin typeface="Microsoft JhengHei"/>
+              </a:rPr>
+              <a:t>原圖：docs/images/D-09-erd-part2-review.png</a:t>
+            </a:r>
+          </a:p>
+        </p:txBody>
+      </p:sp>
+    </p:spTree>
+  </p:cSld>
+  <p:clrMapOvr>
+    <a:masterClrMapping/>
+  </p:clrMapOvr>
+</p:sld>
+</file>
+
+<file path=ppt/slides/slide21.xml><?xml version="1.0" encoding="utf-8"?>
+<p:sld xmlns:a="http://schemas.openxmlformats.org/drawingml/2006/main" xmlns:p="http://schemas.openxmlformats.org/presentationml/2006/main" xmlns:r="http://schemas.openxmlformats.org/officeDocument/2006/relationships">
+  <p:cSld>
+    <p:bg>
+      <p:bgPr>
+        <a:solidFill>
+          <a:srgbClr val="FFFFFF"/>
+        </a:solidFill>
+        <a:effectLst/>
+      </p:bgPr>
+    </p:bg>
+    <p:spTree>
+      <p:nvGrpSpPr>
+        <p:cNvPr id="1" name=""/>
+        <p:cNvGrpSpPr/>
+        <p:nvPr/>
+      </p:nvGrpSpPr>
+      <p:grpSpPr/>
+      <p:sp>
+        <p:nvSpPr>
+          <p:cNvPr id="2" name="Rectangle 1"/>
+          <p:cNvSpPr/>
+          <p:nvPr/>
+        </p:nvSpPr>
+        <p:spPr>
+          <a:xfrm>
+            <a:off x="0" y="0"/>
+            <a:ext cx="12191695" cy="164592"/>
+          </a:xfrm>
+          <a:prstGeom prst="rect">
+            <a:avLst/>
+          </a:prstGeom>
+          <a:solidFill>
+            <a:srgbClr val="208985"/>
+          </a:solidFill>
+          <a:ln>
+            <a:noFill/>
+          </a:ln>
+        </p:spPr>
+        <p:style>
+          <a:lnRef idx="1">
+            <a:schemeClr val="accent1"/>
+          </a:lnRef>
+          <a:fillRef idx="3">
+            <a:schemeClr val="accent1"/>
+          </a:fillRef>
+          <a:effectRef idx="2">
+            <a:schemeClr val="accent1"/>
+          </a:effectRef>
+          <a:fontRef idx="minor">
+            <a:schemeClr val="lt1"/>
+          </a:fontRef>
+        </p:style>
+        <p:txBody>
+          <a:bodyPr rtlCol="0" anchor="ctr"/>
+          <a:lstStyle/>
+          <a:p>
+            <a:pPr algn="ctr"/>
+          </a:p>
+        </p:txBody>
+      </p:sp>
+      <p:sp>
+        <p:nvSpPr>
+          <p:cNvPr id="3" name="TextBox 2"/>
+          <p:cNvSpPr txBox="1"/>
+          <p:nvPr/>
+        </p:nvSpPr>
+        <p:spPr>
+          <a:xfrm>
+            <a:off x="566928" y="438912"/>
+            <a:ext cx="10881360" cy="502920"/>
+          </a:xfrm>
+          <a:prstGeom prst="rect">
+            <a:avLst/>
+          </a:prstGeom>
+          <a:noFill/>
+        </p:spPr>
+        <p:txBody>
+          <a:bodyPr wrap="square" lIns="54864" rIns="54864" tIns="27432" bIns="27432" anchor="t">
+            <a:spAutoFit/>
+          </a:bodyPr>
+          <a:lstStyle/>
+          <a:p>
+            <a:pPr algn="l"/>
+            <a:r>
+              <a:rPr sz="2700" b="1">
+                <a:solidFill>
+                  <a:srgbClr val="142E4E"/>
+                </a:solidFill>
+                <a:latin typeface="Microsoft JhengHei"/>
+              </a:rPr>
+              <a:t>圖 18-3｜ERD－資料來源、公告、表單與操作紀錄</a:t>
+            </a:r>
+          </a:p>
+        </p:txBody>
+      </p:sp>
+      <p:sp>
+        <p:nvSpPr>
+          <p:cNvPr id="4" name="TextBox 3"/>
+          <p:cNvSpPr txBox="1"/>
+          <p:nvPr/>
+        </p:nvSpPr>
+        <p:spPr>
+          <a:xfrm>
+            <a:off x="10378440" y="512064"/>
+            <a:ext cx="1234440" cy="228600"/>
+          </a:xfrm>
+          <a:prstGeom prst="rect">
+            <a:avLst/>
+          </a:prstGeom>
+          <a:noFill/>
+        </p:spPr>
+        <p:txBody>
+          <a:bodyPr wrap="square" lIns="54864" rIns="54864" tIns="27432" bIns="27432" anchor="t">
+            <a:spAutoFit/>
+          </a:bodyPr>
+          <a:lstStyle/>
+          <a:p>
+            <a:pPr algn="r"/>
+            <a:r>
+              <a:rPr sz="900" b="1">
+                <a:solidFill>
+                  <a:srgbClr val="208985"/>
+                </a:solidFill>
+                <a:latin typeface="Microsoft JhengHei"/>
+              </a:rPr>
+              <a:t>流程圖附錄</a:t>
+            </a:r>
+          </a:p>
+        </p:txBody>
+      </p:sp>
+      <p:sp>
+        <p:nvSpPr>
+          <p:cNvPr id="5" name="TextBox 4"/>
+          <p:cNvSpPr txBox="1"/>
+          <p:nvPr/>
+        </p:nvSpPr>
+        <p:spPr>
+          <a:xfrm>
+            <a:off x="566928" y="6565392"/>
+            <a:ext cx="7772400" cy="182880"/>
+          </a:xfrm>
+          <a:prstGeom prst="rect">
+            <a:avLst/>
+          </a:prstGeom>
+          <a:noFill/>
+        </p:spPr>
+        <p:txBody>
+          <a:bodyPr wrap="square" lIns="54864" rIns="54864" tIns="27432" bIns="27432" anchor="t">
+            <a:spAutoFit/>
+          </a:bodyPr>
+          <a:lstStyle/>
+          <a:p>
+            <a:pPr algn="l"/>
+            <a:r>
+              <a:rPr sz="800" b="0">
+                <a:solidFill>
+                  <a:srgbClr val="5D6B79"/>
+                </a:solidFill>
+                <a:latin typeface="Microsoft JhengHei"/>
+              </a:rPr>
+              <a:t>資管科智慧學習歷程系統｜指導老師討論版</a:t>
+            </a:r>
+          </a:p>
+        </p:txBody>
+      </p:sp>
+      <p:pic>
+        <p:nvPicPr>
+          <p:cNvPr id="6" name="Picture 5" descr="D-09-erd-part3-sources.png"/>
+          <p:cNvPicPr>
+            <a:picLocks noChangeAspect="1"/>
+          </p:cNvPicPr>
+          <p:nvPr/>
+        </p:nvPicPr>
+        <p:blipFill>
+          <a:blip r:embed="rId2"/>
+          <a:stretch>
+            <a:fillRect/>
+          </a:stretch>
+        </p:blipFill>
+        <p:spPr>
+          <a:xfrm>
+            <a:off x="2799846" y="1143000"/>
+            <a:ext cx="6607546" cy="5166360"/>
+          </a:xfrm>
+          <a:prstGeom prst="rect">
+            <a:avLst/>
+          </a:prstGeom>
+        </p:spPr>
+      </p:pic>
+      <p:sp>
+        <p:nvSpPr>
+          <p:cNvPr id="7" name="TextBox 6"/>
+          <p:cNvSpPr txBox="1"/>
+          <p:nvPr/>
+        </p:nvSpPr>
+        <p:spPr>
+          <a:xfrm>
+            <a:off x="658368" y="6272784"/>
+            <a:ext cx="10881360" cy="228600"/>
+          </a:xfrm>
+          <a:prstGeom prst="rect">
+            <a:avLst/>
+          </a:prstGeom>
+          <a:noFill/>
+        </p:spPr>
+        <p:txBody>
+          <a:bodyPr wrap="square" lIns="54864" rIns="54864" tIns="27432" bIns="27432" anchor="t">
+            <a:spAutoFit/>
+          </a:bodyPr>
+          <a:lstStyle/>
+          <a:p>
+            <a:pPr algn="ctr"/>
+            <a:r>
+              <a:rPr sz="1000" b="0">
+                <a:solidFill>
+                  <a:srgbClr val="5D6B79"/>
+                </a:solidFill>
+                <a:latin typeface="Microsoft JhengHei"/>
+              </a:rPr>
+              <a:t>原圖：docs/images/D-09-erd-part3-sources.png</a:t>
+            </a:r>
+          </a:p>
+        </p:txBody>
+      </p:sp>
+    </p:spTree>
+  </p:cSld>
+  <p:clrMapOvr>
+    <a:masterClrMapping/>
+  </p:clrMapOvr>
+</p:sld>
+</file>
+
+<file path=ppt/slides/slide22.xml><?xml version="1.0" encoding="utf-8"?>
+<p:sld xmlns:a="http://schemas.openxmlformats.org/drawingml/2006/main" xmlns:p="http://schemas.openxmlformats.org/presentationml/2006/main" xmlns:r="http://schemas.openxmlformats.org/officeDocument/2006/relationships">
+  <p:cSld>
+    <p:bg>
+      <p:bgPr>
+        <a:solidFill>
+          <a:srgbClr val="FFFFFF"/>
+        </a:solidFill>
+        <a:effectLst/>
+      </p:bgPr>
+    </p:bg>
+    <p:spTree>
+      <p:nvGrpSpPr>
+        <p:cNvPr id="1" name=""/>
+        <p:cNvGrpSpPr/>
+        <p:nvPr/>
+      </p:nvGrpSpPr>
+      <p:grpSpPr/>
+      <p:sp>
+        <p:nvSpPr>
+          <p:cNvPr id="2" name="Rectangle 1"/>
+          <p:cNvSpPr/>
+          <p:nvPr/>
+        </p:nvSpPr>
+        <p:spPr>
+          <a:xfrm>
+            <a:off x="0" y="0"/>
+            <a:ext cx="12191695" cy="164592"/>
+          </a:xfrm>
+          <a:prstGeom prst="rect">
+            <a:avLst/>
+          </a:prstGeom>
+          <a:solidFill>
+            <a:srgbClr val="208985"/>
+          </a:solidFill>
+          <a:ln>
+            <a:noFill/>
+          </a:ln>
+        </p:spPr>
+        <p:style>
+          <a:lnRef idx="1">
+            <a:schemeClr val="accent1"/>
+          </a:lnRef>
+          <a:fillRef idx="3">
+            <a:schemeClr val="accent1"/>
+          </a:fillRef>
+          <a:effectRef idx="2">
+            <a:schemeClr val="accent1"/>
+          </a:effectRef>
+          <a:fontRef idx="minor">
+            <a:schemeClr val="lt1"/>
+          </a:fontRef>
+        </p:style>
+        <p:txBody>
+          <a:bodyPr rtlCol="0" anchor="ctr"/>
+          <a:lstStyle/>
+          <a:p>
+            <a:pPr algn="ctr"/>
+          </a:p>
+        </p:txBody>
+      </p:sp>
+      <p:sp>
+        <p:nvSpPr>
+          <p:cNvPr id="3" name="TextBox 2"/>
+          <p:cNvSpPr txBox="1"/>
+          <p:nvPr/>
+        </p:nvSpPr>
+        <p:spPr>
+          <a:xfrm>
+            <a:off x="566928" y="438912"/>
+            <a:ext cx="10881360" cy="502920"/>
+          </a:xfrm>
+          <a:prstGeom prst="rect">
+            <a:avLst/>
+          </a:prstGeom>
+          <a:noFill/>
+        </p:spPr>
+        <p:txBody>
+          <a:bodyPr wrap="square" lIns="54864" rIns="54864" tIns="27432" bIns="27432" anchor="t">
+            <a:spAutoFit/>
+          </a:bodyPr>
+          <a:lstStyle/>
+          <a:p>
+            <a:pPr algn="l"/>
+            <a:r>
+              <a:rPr sz="2700" b="1">
+                <a:solidFill>
+                  <a:srgbClr val="142E4E"/>
+                </a:solidFill>
+                <a:latin typeface="Microsoft JhengHei"/>
+              </a:rPr>
+              <a:t>圖 19｜報告用總體流程圖</a:t>
+            </a:r>
+          </a:p>
+        </p:txBody>
+      </p:sp>
+      <p:sp>
+        <p:nvSpPr>
+          <p:cNvPr id="4" name="TextBox 3"/>
+          <p:cNvSpPr txBox="1"/>
+          <p:nvPr/>
+        </p:nvSpPr>
+        <p:spPr>
+          <a:xfrm>
+            <a:off x="10378440" y="512064"/>
+            <a:ext cx="1234440" cy="228600"/>
+          </a:xfrm>
+          <a:prstGeom prst="rect">
+            <a:avLst/>
+          </a:prstGeom>
+          <a:noFill/>
+        </p:spPr>
+        <p:txBody>
+          <a:bodyPr wrap="square" lIns="54864" rIns="54864" tIns="27432" bIns="27432" anchor="t">
+            <a:spAutoFit/>
+          </a:bodyPr>
+          <a:lstStyle/>
+          <a:p>
+            <a:pPr algn="r"/>
+            <a:r>
+              <a:rPr sz="900" b="1">
+                <a:solidFill>
+                  <a:srgbClr val="208985"/>
+                </a:solidFill>
+                <a:latin typeface="Microsoft JhengHei"/>
+              </a:rPr>
+              <a:t>流程圖附錄</a:t>
+            </a:r>
+          </a:p>
+        </p:txBody>
+      </p:sp>
+      <p:sp>
+        <p:nvSpPr>
+          <p:cNvPr id="5" name="TextBox 4"/>
+          <p:cNvSpPr txBox="1"/>
+          <p:nvPr/>
+        </p:nvSpPr>
+        <p:spPr>
+          <a:xfrm>
+            <a:off x="566928" y="6565392"/>
+            <a:ext cx="7772400" cy="182880"/>
+          </a:xfrm>
+          <a:prstGeom prst="rect">
+            <a:avLst/>
+          </a:prstGeom>
+          <a:noFill/>
+        </p:spPr>
+        <p:txBody>
+          <a:bodyPr wrap="square" lIns="54864" rIns="54864" tIns="27432" bIns="27432" anchor="t">
+            <a:spAutoFit/>
+          </a:bodyPr>
+          <a:lstStyle/>
+          <a:p>
+            <a:pPr algn="l"/>
+            <a:r>
+              <a:rPr sz="800" b="0">
+                <a:solidFill>
+                  <a:srgbClr val="5D6B79"/>
+                </a:solidFill>
+                <a:latin typeface="Microsoft JhengHei"/>
+              </a:rPr>
+              <a:t>資管科智慧學習歷程系統｜指導老師討論版</a:t>
+            </a:r>
+          </a:p>
+        </p:txBody>
+      </p:sp>
+      <p:pic>
+        <p:nvPicPr>
+          <p:cNvPr id="6" name="Picture 5" descr="D-15-report-overview.png"/>
+          <p:cNvPicPr>
+            <a:picLocks noChangeAspect="1"/>
+          </p:cNvPicPr>
+          <p:nvPr/>
+        </p:nvPicPr>
+        <p:blipFill>
+          <a:blip r:embed="rId2"/>
+          <a:stretch>
+            <a:fillRect/>
+          </a:stretch>
+        </p:blipFill>
+        <p:spPr>
+          <a:xfrm>
+            <a:off x="502920" y="3433286"/>
+            <a:ext cx="11201400" cy="585787"/>
+          </a:xfrm>
+          <a:prstGeom prst="rect">
+            <a:avLst/>
+          </a:prstGeom>
+        </p:spPr>
+      </p:pic>
+      <p:sp>
+        <p:nvSpPr>
+          <p:cNvPr id="7" name="TextBox 6"/>
+          <p:cNvSpPr txBox="1"/>
+          <p:nvPr/>
+        </p:nvSpPr>
+        <p:spPr>
+          <a:xfrm>
+            <a:off x="658368" y="6272784"/>
+            <a:ext cx="10881360" cy="228600"/>
+          </a:xfrm>
+          <a:prstGeom prst="rect">
+            <a:avLst/>
+          </a:prstGeom>
+          <a:noFill/>
+        </p:spPr>
+        <p:txBody>
+          <a:bodyPr wrap="square" lIns="54864" rIns="54864" tIns="27432" bIns="27432" anchor="t">
+            <a:spAutoFit/>
+          </a:bodyPr>
+          <a:lstStyle/>
+          <a:p>
+            <a:pPr algn="ctr"/>
+            <a:r>
+              <a:rPr sz="1000" b="0">
+                <a:solidFill>
+                  <a:srgbClr val="5D6B79"/>
+                </a:solidFill>
+                <a:latin typeface="Microsoft JhengHei"/>
+              </a:rPr>
+              <a:t>原圖：docs/images/D-15-report-overview.png</a:t>
             </a:r>
           </a:p>
         </p:txBody>
@@ -5703,8 +6639,8 @@
         </p:blipFill>
         <p:spPr>
           <a:xfrm>
-            <a:off x="2907260" y="1143000"/>
-            <a:ext cx="6392718" cy="5166360"/>
+            <a:off x="3220343" y="1143000"/>
+            <a:ext cx="5766552" cy="5166360"/>
           </a:xfrm>
           <a:prstGeom prst="rect">
             <a:avLst/>
@@ -5845,7 +6781,7 @@
                 </a:solidFill>
                 <a:latin typeface="Microsoft JhengHei"/>
               </a:rPr>
-              <a:t>圖 3｜系統管理者使用案例圖</a:t>
+              <a:t>圖 3｜科辦／科助使用案例圖</a:t>
             </a:r>
           </a:p>
         </p:txBody>
@@ -5922,7 +6858,7 @@
       </p:sp>
       <p:pic>
         <p:nvPicPr>
-          <p:cNvPr id="6" name="Picture 5" descr="D-01-use-case-admin.png"/>
+          <p:cNvPr id="6" name="Picture 5" descr="D-01-use-case-staff.png"/>
           <p:cNvPicPr>
             <a:picLocks noChangeAspect="1"/>
           </p:cNvPicPr>
@@ -5974,7 +6910,7 @@
                 </a:solidFill>
                 <a:latin typeface="Microsoft JhengHei"/>
               </a:rPr>
-              <a:t>原圖：docs/images/D-01-use-case-admin.png</a:t>
+              <a:t>原圖：docs/images/D-01-use-case-staff.png</a:t>
             </a:r>
           </a:p>
         </p:txBody>
@@ -6078,7 +7014,7 @@
                 </a:solidFill>
                 <a:latin typeface="Microsoft JhengHei"/>
               </a:rPr>
-              <a:t>圖 1-1｜科辦／科助使用案例圖</a:t>
+              <a:t>圖 4｜系統管理者使用案例圖</a:t>
             </a:r>
           </a:p>
         </p:txBody>
@@ -6155,7 +7091,7 @@
       </p:sp>
       <p:pic>
         <p:nvPicPr>
-          <p:cNvPr id="6" name="Picture 5" descr="D-01-use-case-staff.png"/>
+          <p:cNvPr id="6" name="Picture 5" descr="D-01-use-case-admin.png"/>
           <p:cNvPicPr>
             <a:picLocks noChangeAspect="1"/>
           </p:cNvPicPr>
@@ -6169,8 +7105,8 @@
         </p:blipFill>
         <p:spPr>
           <a:xfrm>
-            <a:off x="2020529" y="1143000"/>
-            <a:ext cx="8166181" cy="5166360"/>
+            <a:off x="2907260" y="1143000"/>
+            <a:ext cx="6392718" cy="5166360"/>
           </a:xfrm>
           <a:prstGeom prst="rect">
             <a:avLst/>
@@ -6207,7 +7143,7 @@
                 </a:solidFill>
                 <a:latin typeface="Microsoft JhengHei"/>
               </a:rPr>
-              <a:t>原圖：docs/images/D-01-use-case-staff.png</a:t>
+              <a:t>原圖：docs/images/D-01-use-case-admin.png</a:t>
             </a:r>
           </a:p>
         </p:txBody>
@@ -6311,7 +7247,7 @@
                 </a:solidFill>
                 <a:latin typeface="Microsoft JhengHei"/>
               </a:rPr>
-              <a:t>圖 4｜登入與角色導頁流程圖</a:t>
+              <a:t>圖 5｜登入與角色導頁流程圖</a:t>
             </a:r>
           </a:p>
         </p:txBody>
@@ -6544,7 +7480,7 @@
                 </a:solidFill>
                 <a:latin typeface="Microsoft JhengHei"/>
               </a:rPr>
-              <a:t>圖 5｜學生主線流程圖</a:t>
+              <a:t>圖 6｜學生主線流程圖</a:t>
             </a:r>
           </a:p>
         </p:txBody>
@@ -6635,8 +7571,8 @@
         </p:blipFill>
         <p:spPr>
           <a:xfrm>
-            <a:off x="5324092" y="1143000"/>
-            <a:ext cx="1559055" cy="5166360"/>
+            <a:off x="5354096" y="1143000"/>
+            <a:ext cx="1499047" cy="5166359"/>
           </a:xfrm>
           <a:prstGeom prst="rect">
             <a:avLst/>
@@ -6777,7 +7713,7 @@
                 </a:solidFill>
                 <a:latin typeface="Microsoft JhengHei"/>
               </a:rPr>
-              <a:t>圖 6｜科辦表單下載區流程圖</a:t>
+              <a:t>圖 7｜學校資料匯入流程圖</a:t>
             </a:r>
           </a:p>
         </p:txBody>
@@ -6854,7 +7790,7 @@
       </p:sp>
       <p:pic>
         <p:nvPicPr>
-          <p:cNvPr id="6" name="Picture 5" descr="D-20-form-download-flow.png"/>
+          <p:cNvPr id="6" name="Picture 5" descr="D-21-school-data-import-flow.png"/>
           <p:cNvPicPr>
             <a:picLocks noChangeAspect="1"/>
           </p:cNvPicPr>
@@ -6868,8 +7804,8 @@
         </p:blipFill>
         <p:spPr>
           <a:xfrm>
-            <a:off x="4939704" y="1143000"/>
-            <a:ext cx="2327831" cy="5166360"/>
+            <a:off x="3533552" y="1143000"/>
+            <a:ext cx="5140134" cy="5166360"/>
           </a:xfrm>
           <a:prstGeom prst="rect">
             <a:avLst/>
@@ -6906,7 +7842,7 @@
                 </a:solidFill>
                 <a:latin typeface="Microsoft JhengHei"/>
               </a:rPr>
-              <a:t>原圖：docs/images/D-20-form-download-flow.png</a:t>
+              <a:t>原圖：docs/images/D-21-school-data-import-flow.png</a:t>
             </a:r>
           </a:p>
         </p:txBody>
@@ -7010,7 +7946,7 @@
                 </a:solidFill>
                 <a:latin typeface="Microsoft JhengHei"/>
               </a:rPr>
-              <a:t>圖 8｜招生資料更新流程圖</a:t>
+              <a:t>圖 8｜導師確認流程圖</a:t>
             </a:r>
           </a:p>
         </p:txBody>
@@ -7087,7 +8023,7 @@
       </p:sp>
       <p:pic>
         <p:nvPicPr>
-          <p:cNvPr id="6" name="Picture 5" descr="D-13-admission-rule-update-flow.png"/>
+          <p:cNvPr id="6" name="Picture 5" descr="D-16-teacher-confirm-flow.png"/>
           <p:cNvPicPr>
             <a:picLocks noChangeAspect="1"/>
           </p:cNvPicPr>
@@ -7101,8 +8037,8 @@
         </p:blipFill>
         <p:spPr>
           <a:xfrm>
-            <a:off x="5207904" y="1142999"/>
-            <a:ext cx="1791431" cy="5166360"/>
+            <a:off x="3417660" y="1143000"/>
+            <a:ext cx="5371918" cy="5166360"/>
           </a:xfrm>
           <a:prstGeom prst="rect">
             <a:avLst/>
@@ -7139,7 +8075,7 @@
                 </a:solidFill>
                 <a:latin typeface="Microsoft JhengHei"/>
               </a:rPr>
-              <a:t>原圖：docs/images/D-13-admission-rule-update-flow.png</a:t>
+              <a:t>原圖：docs/images/D-16-teacher-confirm-flow.png</a:t>
             </a:r>
           </a:p>
         </p:txBody>
